--- a/Documents/Presentation/Presentation_PriyanshNayak.pptx
+++ b/Documents/Presentation/Presentation_PriyanshNayak.pptx
@@ -21740,7 +21740,7 @@
         <p:spPr>
           <a:xfrm>
             <a:off x="1524000" y="4159404"/>
-            <a:ext cx="9144000" cy="1098395"/>
+            <a:ext cx="9144000" cy="1500732"/>
           </a:xfrm>
         </p:spPr>
         <p:txBody>
@@ -21777,6 +21777,21 @@
               </a:rPr>
               <a:t>MSc Computer Science - Augmented and Virtual Reality</a:t>
             </a:r>
+          </a:p>
+          <a:p>
+            <a:r>
+              <a:rPr lang="en-IN" sz="1700" dirty="0">
+                <a:solidFill>
+                  <a:srgbClr val="FFFFFF"/>
+                </a:solidFill>
+              </a:rPr>
+              <a:t>Trinity College Dublin</a:t>
+            </a:r>
+            <a:endParaRPr lang="en-IN" sz="1700" noProof="0" dirty="0">
+              <a:solidFill>
+                <a:srgbClr val="FFFFFF"/>
+              </a:solidFill>
+            </a:endParaRPr>
           </a:p>
         </p:txBody>
       </p:sp>

--- a/Documents/Presentation/Presentation_PriyanshNayak.pptx
+++ b/Documents/Presentation/Presentation_PriyanshNayak.pptx
@@ -17368,7 +17368,7 @@
           <a:p>
             <a:fld id="{0DF6FDED-C109-4DBB-92FD-58952A2C7AE0}" type="datetimeFigureOut">
               <a:rPr lang="en-US" smtClean="0"/>
-              <a:t>7/28/2026</a:t>
+              <a:t>7/29/2026</a:t>
             </a:fld>
             <a:endParaRPr lang="en-US"/>
           </a:p>
@@ -18380,7 +18380,7 @@
           <a:p>
             <a:fld id="{07435F35-5D7A-487F-925C-B3A28A34B067}" type="datetimeFigureOut">
               <a:rPr lang="en-US" smtClean="0"/>
-              <a:t>7/28/2026</a:t>
+              <a:t>7/29/2026</a:t>
             </a:fld>
             <a:endParaRPr lang="en-US"/>
           </a:p>
@@ -18578,7 +18578,7 @@
           <a:p>
             <a:fld id="{07435F35-5D7A-487F-925C-B3A28A34B067}" type="datetimeFigureOut">
               <a:rPr lang="en-US" smtClean="0"/>
-              <a:t>7/28/2026</a:t>
+              <a:t>7/29/2026</a:t>
             </a:fld>
             <a:endParaRPr lang="en-US"/>
           </a:p>
@@ -18786,7 +18786,7 @@
           <a:p>
             <a:fld id="{07435F35-5D7A-487F-925C-B3A28A34B067}" type="datetimeFigureOut">
               <a:rPr lang="en-US" smtClean="0"/>
-              <a:t>7/28/2026</a:t>
+              <a:t>7/29/2026</a:t>
             </a:fld>
             <a:endParaRPr lang="en-US"/>
           </a:p>
@@ -19109,7 +19109,7 @@
           <a:p>
             <a:fld id="{07435F35-5D7A-487F-925C-B3A28A34B067}" type="datetimeFigureOut">
               <a:rPr lang="en-US" smtClean="0"/>
-              <a:t>7/28/2026</a:t>
+              <a:t>7/29/2026</a:t>
             </a:fld>
             <a:endParaRPr lang="en-US"/>
           </a:p>
@@ -19384,7 +19384,7 @@
           <a:p>
             <a:fld id="{07435F35-5D7A-487F-925C-B3A28A34B067}" type="datetimeFigureOut">
               <a:rPr lang="en-US" smtClean="0"/>
-              <a:t>7/28/2026</a:t>
+              <a:t>7/29/2026</a:t>
             </a:fld>
             <a:endParaRPr lang="en-US"/>
           </a:p>
@@ -19649,7 +19649,7 @@
           <a:p>
             <a:fld id="{07435F35-5D7A-487F-925C-B3A28A34B067}" type="datetimeFigureOut">
               <a:rPr lang="en-US" smtClean="0"/>
-              <a:t>7/28/2026</a:t>
+              <a:t>7/29/2026</a:t>
             </a:fld>
             <a:endParaRPr lang="en-US"/>
           </a:p>
@@ -20061,7 +20061,7 @@
           <a:p>
             <a:fld id="{07435F35-5D7A-487F-925C-B3A28A34B067}" type="datetimeFigureOut">
               <a:rPr lang="en-US" smtClean="0"/>
-              <a:t>7/28/2026</a:t>
+              <a:t>7/29/2026</a:t>
             </a:fld>
             <a:endParaRPr lang="en-US"/>
           </a:p>
@@ -20202,7 +20202,7 @@
           <a:p>
             <a:fld id="{07435F35-5D7A-487F-925C-B3A28A34B067}" type="datetimeFigureOut">
               <a:rPr lang="en-US" smtClean="0"/>
-              <a:t>7/28/2026</a:t>
+              <a:t>7/29/2026</a:t>
             </a:fld>
             <a:endParaRPr lang="en-US"/>
           </a:p>
@@ -20315,7 +20315,7 @@
           <a:p>
             <a:fld id="{07435F35-5D7A-487F-925C-B3A28A34B067}" type="datetimeFigureOut">
               <a:rPr lang="en-US" smtClean="0"/>
-              <a:t>7/28/2026</a:t>
+              <a:t>7/29/2026</a:t>
             </a:fld>
             <a:endParaRPr lang="en-US"/>
           </a:p>
@@ -20626,7 +20626,7 @@
           <a:p>
             <a:fld id="{07435F35-5D7A-487F-925C-B3A28A34B067}" type="datetimeFigureOut">
               <a:rPr lang="en-US" smtClean="0"/>
-              <a:t>7/28/2026</a:t>
+              <a:t>7/29/2026</a:t>
             </a:fld>
             <a:endParaRPr lang="en-US"/>
           </a:p>
@@ -20914,7 +20914,7 @@
           <a:p>
             <a:fld id="{07435F35-5D7A-487F-925C-B3A28A34B067}" type="datetimeFigureOut">
               <a:rPr lang="en-US" smtClean="0"/>
-              <a:t>7/28/2026</a:t>
+              <a:t>7/29/2026</a:t>
             </a:fld>
             <a:endParaRPr lang="en-US"/>
           </a:p>
@@ -21155,7 +21155,7 @@
           <a:p>
             <a:fld id="{07435F35-5D7A-487F-925C-B3A28A34B067}" type="datetimeFigureOut">
               <a:rPr lang="en-US" smtClean="0"/>
-              <a:t>7/28/2026</a:t>
+              <a:t>7/29/2026</a:t>
             </a:fld>
             <a:endParaRPr lang="en-US"/>
           </a:p>
@@ -21805,6 +21805,18 @@
   <p:clrMapOvr>
     <a:overrideClrMapping bg1="dk1" tx1="lt1" bg2="dk2" tx2="lt2" accent1="accent1" accent2="accent2" accent3="accent3" accent4="accent4" accent5="accent5" accent6="accent6" hlink="hlink" folHlink="folHlink"/>
   </p:clrMapOvr>
+  <mc:AlternateContent xmlns:mc="http://schemas.openxmlformats.org/markup-compatibility/2006">
+    <mc:Choice xmlns:p14="http://schemas.microsoft.com/office/powerpoint/2010/main" Requires="p14">
+      <p:transition spd="med" p14:dur="700">
+        <p:fade/>
+      </p:transition>
+    </mc:Choice>
+    <mc:Fallback>
+      <p:transition spd="med">
+        <p:fade/>
+      </p:transition>
+    </mc:Fallback>
+  </mc:AlternateContent>
 </p:sld>
 </file>
 
@@ -22285,6 +22297,18 @@
   <p:clrMapOvr>
     <a:masterClrMapping/>
   </p:clrMapOvr>
+  <mc:AlternateContent xmlns:mc="http://schemas.openxmlformats.org/markup-compatibility/2006">
+    <mc:Choice xmlns:p14="http://schemas.microsoft.com/office/powerpoint/2010/main" Requires="p14">
+      <p:transition spd="med" p14:dur="700">
+        <p:fade/>
+      </p:transition>
+    </mc:Choice>
+    <mc:Fallback>
+      <p:transition spd="med">
+        <p:fade/>
+      </p:transition>
+    </mc:Fallback>
+  </mc:AlternateContent>
 </p:sld>
 </file>
 
@@ -22449,6 +22473,9 @@
   <p:clrMapOvr>
     <a:masterClrMapping/>
   </p:clrMapOvr>
+  <p:transition spd="slow">
+    <p:wipe dir="d"/>
+  </p:transition>
 </p:sld>
 </file>
 
@@ -22766,6 +22793,18 @@
   <p:clrMapOvr>
     <a:masterClrMapping/>
   </p:clrMapOvr>
+  <mc:AlternateContent xmlns:mc="http://schemas.openxmlformats.org/markup-compatibility/2006">
+    <mc:Choice xmlns:p159="http://schemas.microsoft.com/office/powerpoint/2015/09/main" Requires="p159">
+      <p:transition xmlns:p14="http://schemas.microsoft.com/office/powerpoint/2010/main" spd="slow" p14:dur="2000">
+        <p159:morph option="byObject"/>
+      </p:transition>
+    </mc:Choice>
+    <mc:Fallback>
+      <p:transition spd="slow">
+        <p:fade/>
+      </p:transition>
+    </mc:Fallback>
+  </mc:AlternateContent>
 </p:sld>
 </file>
 
@@ -22836,6 +22875,18 @@
   <p:clrMapOvr>
     <a:masterClrMapping/>
   </p:clrMapOvr>
+  <mc:AlternateContent xmlns:mc="http://schemas.openxmlformats.org/markup-compatibility/2006">
+    <mc:Choice xmlns:p14="http://schemas.microsoft.com/office/powerpoint/2010/main" Requires="p14">
+      <p:transition spd="slow" p14:dur="3400">
+        <p14:reveal/>
+      </p:transition>
+    </mc:Choice>
+    <mc:Fallback>
+      <p:transition spd="slow">
+        <p:fade/>
+      </p:transition>
+    </mc:Fallback>
+  </mc:AlternateContent>
 </p:sld>
 </file>
 
@@ -23558,6 +23609,9 @@
   <p:clrMapOvr>
     <a:masterClrMapping/>
   </p:clrMapOvr>
+  <p:transition spd="slow">
+    <p:wipe/>
+  </p:transition>
 </p:sld>
 </file>
 
@@ -23724,6 +23778,9 @@
   <p:clrMapOvr>
     <a:masterClrMapping/>
   </p:clrMapOvr>
+  <p:transition spd="slow">
+    <p:push dir="u"/>
+  </p:transition>
 </p:sld>
 </file>
 
@@ -24637,6 +24694,18 @@
   <p:clrMapOvr>
     <a:masterClrMapping/>
   </p:clrMapOvr>
+  <mc:AlternateContent xmlns:mc="http://schemas.openxmlformats.org/markup-compatibility/2006">
+    <mc:Choice xmlns:p159="http://schemas.microsoft.com/office/powerpoint/2015/09/main" Requires="p159">
+      <p:transition xmlns:p14="http://schemas.microsoft.com/office/powerpoint/2010/main" spd="slow" p14:dur="2000">
+        <p159:morph option="byObject"/>
+      </p:transition>
+    </mc:Choice>
+    <mc:Fallback>
+      <p:transition spd="slow">
+        <p:fade/>
+      </p:transition>
+    </mc:Fallback>
+  </mc:AlternateContent>
 </p:sld>
 </file>
 
@@ -28364,6 +28433,18 @@
   <p:clrMapOvr>
     <a:masterClrMapping/>
   </p:clrMapOvr>
+  <mc:AlternateContent xmlns:mc="http://schemas.openxmlformats.org/markup-compatibility/2006">
+    <mc:Choice xmlns:p14="http://schemas.microsoft.com/office/powerpoint/2010/main" Requires="p14">
+      <p:transition spd="slow" p14:dur="1300">
+        <p14:pan dir="u"/>
+      </p:transition>
+    </mc:Choice>
+    <mc:Fallback>
+      <p:transition spd="slow">
+        <p:fade/>
+      </p:transition>
+    </mc:Fallback>
+  </mc:AlternateContent>
 </p:sld>
 </file>
 
@@ -28585,6 +28666,9 @@
   <p:clrMapOvr>
     <a:masterClrMapping/>
   </p:clrMapOvr>
+  <p:transition spd="slow">
+    <p:cover dir="d"/>
+  </p:transition>
 </p:sld>
 </file>
 
@@ -29403,6 +29487,9 @@
   <p:clrMapOvr>
     <a:masterClrMapping/>
   </p:clrMapOvr>
+  <p:transition spd="med">
+    <p:pull dir="d"/>
+  </p:transition>
 </p:sld>
 </file>
 
@@ -29676,6 +29763,9 @@
   <p:clrMapOvr>
     <a:masterClrMapping/>
   </p:clrMapOvr>
+  <p:transition spd="slow">
+    <p:push/>
+  </p:transition>
 </p:sld>
 </file>
 
@@ -30302,6 +30392,18 @@
   <p:clrMapOvr>
     <a:masterClrMapping/>
   </p:clrMapOvr>
+  <mc:AlternateContent xmlns:mc="http://schemas.openxmlformats.org/markup-compatibility/2006">
+    <mc:Choice xmlns:p14="http://schemas.microsoft.com/office/powerpoint/2010/main" Requires="p14">
+      <p:transition spd="slow" p14:dur="1200">
+        <p:zoom/>
+      </p:transition>
+    </mc:Choice>
+    <mc:Fallback>
+      <p:transition spd="slow">
+        <p:zoom/>
+      </p:transition>
+    </mc:Fallback>
+  </mc:AlternateContent>
 </p:sld>
 </file>
 
